--- a/Section 2 - Copilot Overview/01. Copilot Overview.pptx
+++ b/Section 2 - Copilot Overview/01. Copilot Overview.pptx
@@ -1,6 +1,6 @@
 
 <file path=ppt/presentation.xml><?xml version="1.0" encoding="utf-8"?>
-<p:presentation xmlns:a="http://schemas.openxmlformats.org/drawingml/2006/main" xmlns:r="http://schemas.openxmlformats.org/officeDocument/2006/relationships" xmlns:p="http://schemas.openxmlformats.org/presentationml/2006/main" saveSubsetFonts="1">
+<p:presentation xmlns:a="http://schemas.openxmlformats.org/drawingml/2006/main" xmlns:r="http://schemas.openxmlformats.org/officeDocument/2006/relationships" xmlns:p="http://schemas.openxmlformats.org/presentationml/2006/main" embedTrueTypeFonts="1">
   <p:sldMasterIdLst>
     <p:sldMasterId id="2147483690" r:id="rId1"/>
   </p:sldMasterIdLst>
@@ -12,6 +12,41 @@
   </p:sldIdLst>
   <p:sldSz cx="12192000" cy="6858000"/>
   <p:notesSz cx="6858000" cy="9144000"/>
+  <p:embeddedFontLst>
+    <p:embeddedFont>
+      <p:font typeface="Lato" panose="020F0502020204030203" pitchFamily="34" charset="0"/>
+      <p:regular r:id="rId4"/>
+      <p:bold r:id="rId5"/>
+      <p:italic r:id="rId6"/>
+      <p:boldItalic r:id="rId7"/>
+    </p:embeddedFont>
+    <p:embeddedFont>
+      <p:font typeface="Lato Light" panose="020F0302020204030203" pitchFamily="34" charset="-18"/>
+      <p:regular r:id="rId8"/>
+      <p:italic r:id="rId9"/>
+    </p:embeddedFont>
+    <p:embeddedFont>
+      <p:font typeface="Lato Regular" panose="020F0502020204030203" pitchFamily="34" charset="0"/>
+      <p:regular r:id="rId10"/>
+    </p:embeddedFont>
+    <p:embeddedFont>
+      <p:font typeface="Poppins" panose="00000500000000000000" pitchFamily="2" charset="-18"/>
+      <p:regular r:id="rId11"/>
+      <p:bold r:id="rId12"/>
+      <p:italic r:id="rId13"/>
+      <p:boldItalic r:id="rId14"/>
+    </p:embeddedFont>
+    <p:embeddedFont>
+      <p:font typeface="Poppins Light" panose="00000400000000000000" pitchFamily="2" charset="-18"/>
+      <p:regular r:id="rId15"/>
+      <p:italic r:id="rId16"/>
+    </p:embeddedFont>
+    <p:embeddedFont>
+      <p:font typeface="Raleway Light" pitchFamily="2" charset="-18"/>
+      <p:regular r:id="rId17"/>
+      <p:italic r:id="rId18"/>
+    </p:embeddedFont>
+  </p:embeddedFontLst>
   <p:defaultTextStyle>
     <a:defPPr>
       <a:defRPr lang="pl-PL"/>
@@ -197,7 +232,7 @@
           <a:p>
             <a:fld id="{D379310B-B760-4543-9F8C-E5E20896AA57}" type="datetimeFigureOut">
               <a:rPr lang="en-US" smtClean="0"/>
-              <a:t>1/27/2025</a:t>
+              <a:t>6/17/2025</a:t>
             </a:fld>
             <a:endParaRPr lang="en-US"/>
           </a:p>
@@ -10408,7 +10443,7 @@
           <a:p>
             <a:fld id="{5B3D09D8-42D0-42FC-81AE-FB0211369699}" type="datetimeFigureOut">
               <a:rPr lang="en-US" smtClean="0"/>
-              <a:t>1/27/2025</a:t>
+              <a:t>6/17/2025</a:t>
             </a:fld>
             <a:endParaRPr lang="en-US"/>
           </a:p>
@@ -11074,124 +11109,6 @@
       </p:sp>
       <p:sp>
         <p:nvSpPr>
-          <p:cNvPr id="10" name="Google Shape;116;p34">
-            <a:extLst>
-              <a:ext uri="{FF2B5EF4-FFF2-40B4-BE49-F238E27FC236}">
-                <a16:creationId xmlns:a16="http://schemas.microsoft.com/office/drawing/2014/main" id="{9B5DC36F-BE83-C550-738F-D1629DC0F8B6}"/>
-              </a:ext>
-            </a:extLst>
-          </p:cNvPr>
-          <p:cNvSpPr txBox="1"/>
-          <p:nvPr/>
-        </p:nvSpPr>
-        <p:spPr>
-          <a:xfrm>
-            <a:off x="3381672" y="5081118"/>
-            <a:ext cx="2502936" cy="830956"/>
-          </a:xfrm>
-          <a:prstGeom prst="rect">
-            <a:avLst/>
-          </a:prstGeom>
-          <a:noFill/>
-          <a:ln>
-            <a:noFill/>
-          </a:ln>
-        </p:spPr>
-        <p:txBody>
-          <a:bodyPr spcFirstLastPara="1" wrap="square" lIns="91433" tIns="45700" rIns="91433" bIns="45700" anchor="t" anchorCtr="0">
-            <a:spAutoFit/>
-          </a:bodyPr>
-          <a:lstStyle/>
-          <a:p>
-            <a:pPr marL="0" marR="0" lvl="0" indent="0" algn="ctr" defTabSz="914400" rtl="0" eaLnBrk="1" fontAlgn="auto" latinLnBrk="0" hangingPunct="1">
-              <a:lnSpc>
-                <a:spcPct val="100000"/>
-              </a:lnSpc>
-              <a:spcBef>
-                <a:spcPts val="0"/>
-              </a:spcBef>
-              <a:spcAft>
-                <a:spcPts val="0"/>
-              </a:spcAft>
-              <a:buClrTx/>
-              <a:buSzTx/>
-              <a:buFontTx/>
-              <a:buNone/>
-              <a:tabLst/>
-              <a:defRPr/>
-            </a:pPr>
-            <a:r>
-              <a:rPr kumimoji="0" lang="pl-PL" sz="2400" i="0" u="none" strike="noStrike" kern="1200" cap="none" spc="0" normalizeH="0" baseline="0" noProof="0" dirty="0">
-                <a:ln>
-                  <a:noFill/>
-                </a:ln>
-                <a:solidFill>
-                  <a:schemeClr val="bg1"/>
-                </a:solidFill>
-                <a:effectLst/>
-                <a:uLnTx/>
-                <a:uFillTx/>
-                <a:latin typeface="Poppins Light"/>
-                <a:ea typeface="+mn-ea"/>
-                <a:cs typeface="+mn-cs"/>
-              </a:rPr>
-              <a:t>Copilot</a:t>
-            </a:r>
-          </a:p>
-          <a:p>
-            <a:pPr marL="0" marR="0" lvl="0" indent="0" algn="ctr" defTabSz="914400" rtl="0" eaLnBrk="1" fontAlgn="auto" latinLnBrk="0" hangingPunct="1">
-              <a:lnSpc>
-                <a:spcPct val="100000"/>
-              </a:lnSpc>
-              <a:spcBef>
-                <a:spcPts val="0"/>
-              </a:spcBef>
-              <a:spcAft>
-                <a:spcPts val="0"/>
-              </a:spcAft>
-              <a:buClrTx/>
-              <a:buSzTx/>
-              <a:buFontTx/>
-              <a:buNone/>
-              <a:tabLst/>
-              <a:defRPr/>
-            </a:pPr>
-            <a:r>
-              <a:rPr kumimoji="0" lang="pl-PL" sz="2400" i="0" u="none" strike="noStrike" kern="1200" cap="none" spc="0" normalizeH="0" baseline="0" noProof="0" dirty="0">
-                <a:ln>
-                  <a:noFill/>
-                </a:ln>
-                <a:solidFill>
-                  <a:schemeClr val="bg1"/>
-                </a:solidFill>
-                <a:effectLst/>
-                <a:uLnTx/>
-                <a:uFillTx/>
-                <a:latin typeface="Poppins Light"/>
-                <a:ea typeface="+mn-ea"/>
-                <a:cs typeface="+mn-cs"/>
-              </a:rPr>
-              <a:t> feature</a:t>
-            </a:r>
-            <a:endParaRPr kumimoji="0" lang="en-US" sz="2400" i="0" u="none" strike="noStrike" kern="1200" cap="none" spc="0" normalizeH="0" baseline="0" noProof="0" dirty="0">
-              <a:ln>
-                <a:noFill/>
-              </a:ln>
-              <a:solidFill>
-                <a:schemeClr val="bg1"/>
-              </a:solidFill>
-              <a:effectLst/>
-              <a:uLnTx/>
-              <a:uFillTx/>
-              <a:latin typeface="Poppins Light"/>
-              <a:ea typeface="+mn-ea"/>
-              <a:cs typeface="+mn-cs"/>
-            </a:endParaRPr>
-          </a:p>
-        </p:txBody>
-      </p:sp>
-      <p:sp>
-        <p:nvSpPr>
           <p:cNvPr id="14" name="Google Shape;116;p34">
             <a:extLst>
               <a:ext uri="{FF2B5EF4-FFF2-40B4-BE49-F238E27FC236}">
@@ -11454,42 +11371,181 @@
           </a:prstGeom>
         </p:spPr>
       </p:pic>
-      <p:pic>
-        <p:nvPicPr>
-          <p:cNvPr id="12" name="Graphic 11">
+      <p:grpSp>
+        <p:nvGrpSpPr>
+          <p:cNvPr id="2" name="Group 1">
             <a:extLst>
               <a:ext uri="{FF2B5EF4-FFF2-40B4-BE49-F238E27FC236}">
-                <a16:creationId xmlns:a16="http://schemas.microsoft.com/office/drawing/2014/main" id="{2186BE6D-F586-5C06-A384-D5234EB5D4DE}"/>
+                <a16:creationId xmlns:a16="http://schemas.microsoft.com/office/drawing/2014/main" id="{24868ADC-6EE1-4DD8-7803-81FD6DA0F62B}"/>
               </a:ext>
             </a:extLst>
           </p:cNvPr>
-          <p:cNvPicPr>
-            <a:picLocks noChangeAspect="1"/>
-          </p:cNvPicPr>
+          <p:cNvGrpSpPr/>
           <p:nvPr/>
-        </p:nvPicPr>
-        <p:blipFill>
-          <a:blip r:embed="rId7">
-            <a:extLst>
-              <a:ext uri="{96DAC541-7B7A-43D3-8B79-37D633B846F1}">
-                <asvg:svgBlip xmlns:asvg="http://schemas.microsoft.com/office/drawing/2016/SVG/main" r:embed="rId8"/>
-              </a:ext>
-            </a:extLst>
-          </a:blip>
-          <a:stretch>
-            <a:fillRect/>
-          </a:stretch>
-        </p:blipFill>
-        <p:spPr>
-          <a:xfrm>
-            <a:off x="4102726" y="3574758"/>
-            <a:ext cx="1060827" cy="1060826"/>
-          </a:xfrm>
-          <a:prstGeom prst="rect">
-            <a:avLst/>
-          </a:prstGeom>
-        </p:spPr>
-      </p:pic>
+        </p:nvGrpSpPr>
+        <p:grpSpPr>
+          <a:xfrm>
+            <a:off x="3323800" y="3574758"/>
+            <a:ext cx="2502936" cy="2337316"/>
+            <a:chOff x="3381672" y="3574758"/>
+            <a:chExt cx="2502936" cy="2337316"/>
+          </a:xfrm>
+        </p:grpSpPr>
+        <p:sp>
+          <p:nvSpPr>
+            <p:cNvPr id="10" name="Google Shape;116;p34">
+              <a:extLst>
+                <a:ext uri="{FF2B5EF4-FFF2-40B4-BE49-F238E27FC236}">
+                  <a16:creationId xmlns:a16="http://schemas.microsoft.com/office/drawing/2014/main" id="{9B5DC36F-BE83-C550-738F-D1629DC0F8B6}"/>
+                </a:ext>
+              </a:extLst>
+            </p:cNvPr>
+            <p:cNvSpPr txBox="1"/>
+            <p:nvPr/>
+          </p:nvSpPr>
+          <p:spPr>
+            <a:xfrm>
+              <a:off x="3381672" y="5081118"/>
+              <a:ext cx="2502936" cy="830956"/>
+            </a:xfrm>
+            <a:prstGeom prst="rect">
+              <a:avLst/>
+            </a:prstGeom>
+            <a:noFill/>
+            <a:ln>
+              <a:noFill/>
+            </a:ln>
+          </p:spPr>
+          <p:txBody>
+            <a:bodyPr spcFirstLastPara="1" wrap="square" lIns="91433" tIns="45700" rIns="91433" bIns="45700" anchor="t" anchorCtr="0">
+              <a:spAutoFit/>
+            </a:bodyPr>
+            <a:lstStyle/>
+            <a:p>
+              <a:pPr marL="0" marR="0" lvl="0" indent="0" algn="ctr" defTabSz="914400" rtl="0" eaLnBrk="1" fontAlgn="auto" latinLnBrk="0" hangingPunct="1">
+                <a:lnSpc>
+                  <a:spcPct val="100000"/>
+                </a:lnSpc>
+                <a:spcBef>
+                  <a:spcPts val="0"/>
+                </a:spcBef>
+                <a:spcAft>
+                  <a:spcPts val="0"/>
+                </a:spcAft>
+                <a:buClrTx/>
+                <a:buSzTx/>
+                <a:buFontTx/>
+                <a:buNone/>
+                <a:tabLst/>
+                <a:defRPr/>
+              </a:pPr>
+              <a:r>
+                <a:rPr kumimoji="0" lang="pl-PL" sz="2400" i="0" u="none" strike="noStrike" kern="1200" cap="none" spc="0" normalizeH="0" baseline="0" noProof="0" dirty="0">
+                  <a:ln>
+                    <a:noFill/>
+                  </a:ln>
+                  <a:solidFill>
+                    <a:schemeClr val="bg1"/>
+                  </a:solidFill>
+                  <a:effectLst/>
+                  <a:uLnTx/>
+                  <a:uFillTx/>
+                  <a:latin typeface="Poppins Light"/>
+                  <a:ea typeface="+mn-ea"/>
+                  <a:cs typeface="+mn-cs"/>
+                </a:rPr>
+                <a:t>Copilot</a:t>
+              </a:r>
+            </a:p>
+            <a:p>
+              <a:pPr marL="0" marR="0" lvl="0" indent="0" algn="ctr" defTabSz="914400" rtl="0" eaLnBrk="1" fontAlgn="auto" latinLnBrk="0" hangingPunct="1">
+                <a:lnSpc>
+                  <a:spcPct val="100000"/>
+                </a:lnSpc>
+                <a:spcBef>
+                  <a:spcPts val="0"/>
+                </a:spcBef>
+                <a:spcAft>
+                  <a:spcPts val="0"/>
+                </a:spcAft>
+                <a:buClrTx/>
+                <a:buSzTx/>
+                <a:buFontTx/>
+                <a:buNone/>
+                <a:tabLst/>
+                <a:defRPr/>
+              </a:pPr>
+              <a:r>
+                <a:rPr kumimoji="0" lang="pl-PL" sz="2400" i="0" u="none" strike="noStrike" kern="1200" cap="none" spc="0" normalizeH="0" baseline="0" noProof="0" dirty="0">
+                  <a:ln>
+                    <a:noFill/>
+                  </a:ln>
+                  <a:solidFill>
+                    <a:schemeClr val="bg1"/>
+                  </a:solidFill>
+                  <a:effectLst/>
+                  <a:uLnTx/>
+                  <a:uFillTx/>
+                  <a:latin typeface="Poppins Light"/>
+                  <a:ea typeface="+mn-ea"/>
+                  <a:cs typeface="+mn-cs"/>
+                </a:rPr>
+                <a:t> feature</a:t>
+              </a:r>
+              <a:endParaRPr kumimoji="0" lang="en-US" sz="2400" i="0" u="none" strike="noStrike" kern="1200" cap="none" spc="0" normalizeH="0" baseline="0" noProof="0" dirty="0">
+                <a:ln>
+                  <a:noFill/>
+                </a:ln>
+                <a:solidFill>
+                  <a:schemeClr val="bg1"/>
+                </a:solidFill>
+                <a:effectLst/>
+                <a:uLnTx/>
+                <a:uFillTx/>
+                <a:latin typeface="Poppins Light"/>
+                <a:ea typeface="+mn-ea"/>
+                <a:cs typeface="+mn-cs"/>
+              </a:endParaRPr>
+            </a:p>
+          </p:txBody>
+        </p:sp>
+        <p:pic>
+          <p:nvPicPr>
+            <p:cNvPr id="12" name="Graphic 11">
+              <a:extLst>
+                <a:ext uri="{FF2B5EF4-FFF2-40B4-BE49-F238E27FC236}">
+                  <a16:creationId xmlns:a16="http://schemas.microsoft.com/office/drawing/2014/main" id="{2186BE6D-F586-5C06-A384-D5234EB5D4DE}"/>
+                </a:ext>
+              </a:extLst>
+            </p:cNvPr>
+            <p:cNvPicPr>
+              <a:picLocks noChangeAspect="1"/>
+            </p:cNvPicPr>
+            <p:nvPr/>
+          </p:nvPicPr>
+          <p:blipFill>
+            <a:blip r:embed="rId7">
+              <a:extLst>
+                <a:ext uri="{96DAC541-7B7A-43D3-8B79-37D633B846F1}">
+                  <asvg:svgBlip xmlns:asvg="http://schemas.microsoft.com/office/drawing/2016/SVG/main" r:embed="rId8"/>
+                </a:ext>
+              </a:extLst>
+            </a:blip>
+            <a:stretch>
+              <a:fillRect/>
+            </a:stretch>
+          </p:blipFill>
+          <p:spPr>
+            <a:xfrm>
+              <a:off x="4102726" y="3574758"/>
+              <a:ext cx="1060827" cy="1060826"/>
+            </a:xfrm>
+            <a:prstGeom prst="rect">
+              <a:avLst/>
+            </a:prstGeom>
+          </p:spPr>
+        </p:pic>
+      </p:grpSp>
       <p:pic>
         <p:nvPicPr>
           <p:cNvPr id="18" name="Graphic 17">
